--- a/Bronze Badge Assignments/PolicyPal.pptx
+++ b/Bronze Badge Assignments/PolicyPal.pptx
@@ -205,7 +205,7 @@
           <a:p>
             <a:fld id="{1DF86431-A8D6-4564-A742-228ED5F358FD}" type="datetimeFigureOut">
               <a:rPr lang="en-US" smtClean="0"/>
-              <a:t>8/17/2026</a:t>
+              <a:t>8/18/2026</a:t>
             </a:fld>
             <a:endParaRPr lang="en-US"/>
           </a:p>
@@ -664,7 +664,7 @@
           <a:p>
             <a:fld id="{3973E725-7F70-40B3-93A4-69B9B8AE451F}" type="datetime1">
               <a:rPr lang="en-US" smtClean="0"/>
-              <a:t>8/17/2026</a:t>
+              <a:t>8/18/2026</a:t>
             </a:fld>
             <a:endParaRPr lang="en-US"/>
           </a:p>
@@ -1104,7 +1104,7 @@
           <a:p>
             <a:fld id="{5F028F55-315B-4EAF-8395-4E3BF934269F}" type="datetime1">
               <a:rPr lang="en-US" smtClean="0"/>
-              <a:t>8/17/2026</a:t>
+              <a:t>8/18/2026</a:t>
             </a:fld>
             <a:endParaRPr lang="en-US"/>
           </a:p>
@@ -1358,7 +1358,7 @@
           <a:p>
             <a:fld id="{CA2A29C3-53E6-454A-B61B-176D1BB2F74E}" type="datetime1">
               <a:rPr lang="en-US" smtClean="0"/>
-              <a:t>8/17/2026</a:t>
+              <a:t>8/18/2026</a:t>
             </a:fld>
             <a:endParaRPr lang="en-US"/>
           </a:p>
@@ -1670,7 +1670,7 @@
           <a:p>
             <a:fld id="{BF07671D-405C-4FF1-8794-D11A168AE62B}" type="datetime1">
               <a:rPr lang="en-US" smtClean="0"/>
-              <a:t>8/17/2026</a:t>
+              <a:t>8/18/2026</a:t>
             </a:fld>
             <a:endParaRPr lang="en-US"/>
           </a:p>
@@ -1992,7 +1992,7 @@
           <a:p>
             <a:fld id="{1425EC34-93C3-43A0-8E20-5E1946826F5B}" type="datetime1">
               <a:rPr lang="en-US" smtClean="0"/>
-              <a:t>8/17/2026</a:t>
+              <a:t>8/18/2026</a:t>
             </a:fld>
             <a:endParaRPr lang="en-US"/>
           </a:p>
@@ -2298,7 +2298,7 @@
           <a:p>
             <a:fld id="{4E9DAC21-8591-422B-9A86-3A0D937AE7F4}" type="datetime1">
               <a:rPr lang="en-US" smtClean="0"/>
-              <a:t>8/17/2026</a:t>
+              <a:t>8/18/2026</a:t>
             </a:fld>
             <a:endParaRPr lang="en-US"/>
           </a:p>
@@ -2669,7 +2669,7 @@
           <a:p>
             <a:fld id="{0C4DDB9F-67FE-44F0-BE2C-FB7F89A98209}" type="datetime1">
               <a:rPr lang="en-US" smtClean="0"/>
-              <a:t>8/17/2026</a:t>
+              <a:t>8/18/2026</a:t>
             </a:fld>
             <a:endParaRPr lang="en-US"/>
           </a:p>
@@ -2847,7 +2847,7 @@
           <a:p>
             <a:fld id="{CF5F89FB-7382-4503-85DE-E27B2D7EB547}" type="datetime1">
               <a:rPr lang="en-US" smtClean="0"/>
-              <a:t>8/17/2026</a:t>
+              <a:t>8/18/2026</a:t>
             </a:fld>
             <a:endParaRPr lang="en-US"/>
           </a:p>
@@ -3031,7 +3031,7 @@
           <a:p>
             <a:fld id="{5D424183-6A8D-452F-AF4E-3FB139217415}" type="datetime1">
               <a:rPr lang="en-US" smtClean="0"/>
-              <a:t>8/17/2026</a:t>
+              <a:t>8/18/2026</a:t>
             </a:fld>
             <a:endParaRPr lang="en-US"/>
           </a:p>
@@ -3205,7 +3205,7 @@
           <a:p>
             <a:fld id="{10776CEC-0797-4E2D-A9FC-CABF447D1469}" type="datetime1">
               <a:rPr lang="en-US" smtClean="0"/>
-              <a:t>8/17/2026</a:t>
+              <a:t>8/18/2026</a:t>
             </a:fld>
             <a:endParaRPr lang="en-US"/>
           </a:p>
@@ -3459,7 +3459,7 @@
           <a:p>
             <a:fld id="{F4DAAB1A-C885-41C4-B8D1-2E1CF05A77B3}" type="datetime1">
               <a:rPr lang="en-US" smtClean="0"/>
-              <a:t>8/17/2026</a:t>
+              <a:t>8/18/2026</a:t>
             </a:fld>
             <a:endParaRPr lang="en-US"/>
           </a:p>
@@ -3699,7 +3699,7 @@
           <a:p>
             <a:fld id="{2BA57869-0DBC-489A-AFC0-058C02FFB847}" type="datetime1">
               <a:rPr lang="en-US" smtClean="0"/>
-              <a:t>8/17/2026</a:t>
+              <a:t>8/18/2026</a:t>
             </a:fld>
             <a:endParaRPr lang="en-US"/>
           </a:p>
@@ -4085,7 +4085,7 @@
           <a:p>
             <a:fld id="{64E7050C-E672-4145-A0AD-C47F6A645A9F}" type="datetime1">
               <a:rPr lang="en-US" smtClean="0"/>
-              <a:t>8/17/2026</a:t>
+              <a:t>8/18/2026</a:t>
             </a:fld>
             <a:endParaRPr lang="en-US"/>
           </a:p>
@@ -4207,7 +4207,7 @@
           <a:p>
             <a:fld id="{C5F1D6EB-432B-4E03-85C5-833AF7CEFAB0}" type="datetime1">
               <a:rPr lang="en-US" smtClean="0"/>
-              <a:t>8/17/2026</a:t>
+              <a:t>8/18/2026</a:t>
             </a:fld>
             <a:endParaRPr lang="en-US"/>
           </a:p>
@@ -4306,7 +4306,7 @@
           <a:p>
             <a:fld id="{CF1A2DDA-0CB3-49DA-AA22-4068F08D686B}" type="datetime1">
               <a:rPr lang="en-US" smtClean="0"/>
-              <a:t>8/17/2026</a:t>
+              <a:t>8/18/2026</a:t>
             </a:fld>
             <a:endParaRPr lang="en-US"/>
           </a:p>
@@ -4565,7 +4565,7 @@
           <a:p>
             <a:fld id="{176DA749-2E28-40C1-918B-1BE37604AAA9}" type="datetime1">
               <a:rPr lang="en-US" smtClean="0"/>
-              <a:t>8/17/2026</a:t>
+              <a:t>8/18/2026</a:t>
             </a:fld>
             <a:endParaRPr lang="en-US"/>
           </a:p>
@@ -4852,7 +4852,7 @@
           <a:p>
             <a:fld id="{3BF951D0-804A-4A0B-B70A-DF407DD846C6}" type="datetime1">
               <a:rPr lang="en-US" smtClean="0"/>
-              <a:t>8/17/2026</a:t>
+              <a:t>8/18/2026</a:t>
             </a:fld>
             <a:endParaRPr lang="en-US"/>
           </a:p>
@@ -5288,7 +5288,7 @@
           <a:p>
             <a:fld id="{F77B5FBA-2FBA-4F8D-8463-1AB8E96A9E27}" type="datetime1">
               <a:rPr lang="en-US" smtClean="0"/>
-              <a:t>8/17/2026</a:t>
+              <a:t>8/18/2026</a:t>
             </a:fld>
             <a:endParaRPr lang="en-US"/>
           </a:p>
@@ -9025,7 +9025,39 @@
                 </a:solidFill>
                 <a:latin typeface="Arial" panose="020B0604020202020204" pitchFamily="34" charset="0"/>
               </a:rPr>
-              <a:t>“How to raise claim?”</a:t>
+              <a:t>“How to </a:t>
+            </a:r>
+            <a:r>
+              <a:rPr lang="en-IN" altLang="en-US" sz="2200" b="1" dirty="0" smtClean="0">
+                <a:ln>
+                  <a:solidFill>
+                    <a:schemeClr val="accent1"/>
+                  </a:solidFill>
+                </a:ln>
+                <a:solidFill>
+                  <a:schemeClr val="tx1">
+                    <a:lumMod val="95000"/>
+                  </a:schemeClr>
+                </a:solidFill>
+                <a:latin typeface="Arial" panose="020B0604020202020204" pitchFamily="34" charset="0"/>
+              </a:rPr>
+              <a:t>raise a </a:t>
+            </a:r>
+            <a:r>
+              <a:rPr lang="en-IN" altLang="en-US" sz="2200" b="1" dirty="0" smtClean="0">
+                <a:ln>
+                  <a:solidFill>
+                    <a:schemeClr val="accent1"/>
+                  </a:solidFill>
+                </a:ln>
+                <a:solidFill>
+                  <a:schemeClr val="tx1">
+                    <a:lumMod val="95000"/>
+                  </a:schemeClr>
+                </a:solidFill>
+                <a:latin typeface="Arial" panose="020B0604020202020204" pitchFamily="34" charset="0"/>
+              </a:rPr>
+              <a:t>claim?”</a:t>
             </a:r>
           </a:p>
           <a:p>
@@ -9564,8 +9596,8 @@
         </p:nvSpPr>
         <p:spPr>
           <a:xfrm>
-            <a:off x="579120" y="72150"/>
-            <a:ext cx="9526719" cy="715885"/>
+            <a:off x="1168400" y="72150"/>
+            <a:ext cx="8937439" cy="715885"/>
           </a:xfrm>
         </p:spPr>
         <p:txBody>
@@ -9581,10 +9613,10 @@
               <a:t>Sample </a:t>
             </a:r>
             <a:r>
-              <a:rPr lang="en-US" sz="4800" dirty="0" err="1" smtClean="0">
+              <a:rPr lang="en-US" sz="4800" dirty="0" smtClean="0">
                 <a:latin typeface="Algerian" panose="04020705040A02060702" pitchFamily="82" charset="0"/>
               </a:rPr>
-              <a:t>CHats</a:t>
+              <a:t>Chat</a:t>
             </a:r>
             <a:endParaRPr lang="en-US" sz="4800" dirty="0">
               <a:latin typeface="Algerian" panose="04020705040A02060702" pitchFamily="82" charset="0"/>
@@ -9627,31 +9659,6 @@
           </a:p>
         </p:txBody>
       </p:sp>
-      <p:pic>
-        <p:nvPicPr>
-          <p:cNvPr id="11" name="Picture Placeholder 10"/>
-          <p:cNvPicPr>
-            <a:picLocks noGrp="1" noChangeAspect="1"/>
-          </p:cNvPicPr>
-          <p:nvPr>
-            <p:ph type="pic" idx="1"/>
-          </p:nvPr>
-        </p:nvPicPr>
-        <p:blipFill rotWithShape="1">
-          <a:blip r:embed="rId2"/>
-          <a:srcRect l="805" t="1147" r="1125" b="22815"/>
-          <a:stretch/>
-        </p:blipFill>
-        <p:spPr>
-          <a:xfrm>
-            <a:off x="1306908" y="788035"/>
-            <a:ext cx="8966097" cy="4399785"/>
-          </a:xfrm>
-          <a:prstGeom prst="rect">
-            <a:avLst/>
-          </a:prstGeom>
-        </p:spPr>
-      </p:pic>
       <p:sp>
         <p:nvSpPr>
           <p:cNvPr id="14" name="Footer Placeholder 3"/>
@@ -9662,8 +9669,8 @@
         </p:nvSpPr>
         <p:spPr>
           <a:xfrm>
-            <a:off x="1278915" y="5187820"/>
-            <a:ext cx="3974220" cy="1147666"/>
+            <a:off x="1278915" y="5628640"/>
+            <a:ext cx="3974220" cy="706846"/>
           </a:xfrm>
           <a:prstGeom prst="rect">
             <a:avLst/>
@@ -9792,7 +9799,7 @@
                   <a:schemeClr val="tx1"/>
                 </a:solidFill>
                 <a:latin typeface="Arial" panose="020B0604020202020204" pitchFamily="34" charset="0"/>
-                <a:hlinkClick r:id="rId3"/>
+                <a:hlinkClick r:id="rId2"/>
               </a:rPr>
               <a:t>PolicyPal Demo - Streamlit</a:t>
             </a:r>
@@ -9810,6 +9817,31 @@
           </a:p>
         </p:txBody>
       </p:sp>
+      <p:pic>
+        <p:nvPicPr>
+          <p:cNvPr id="6" name="Picture Placeholder 5"/>
+          <p:cNvPicPr>
+            <a:picLocks noGrp="1" noChangeAspect="1"/>
+          </p:cNvPicPr>
+          <p:nvPr>
+            <p:ph type="pic" idx="1"/>
+          </p:nvPr>
+        </p:nvPicPr>
+        <p:blipFill rotWithShape="1">
+          <a:blip r:embed="rId3"/>
+          <a:srcRect l="-414" t="-536" r="414" b="6638"/>
+          <a:stretch/>
+        </p:blipFill>
+        <p:spPr>
+          <a:xfrm>
+            <a:off x="1278915" y="788035"/>
+            <a:ext cx="8026401" cy="4927601"/>
+          </a:xfrm>
+          <a:prstGeom prst="rect">
+            <a:avLst/>
+          </a:prstGeom>
+        </p:spPr>
+      </p:pic>
     </p:spTree>
     <p:extLst>
       <p:ext uri="{BB962C8B-B14F-4D97-AF65-F5344CB8AC3E}">
